--- a/report/travel_recommendation_presentation.pptx
+++ b/report/travel_recommendation_presentation.pptx
@@ -2753,8 +2753,8 @@
         </p:nvSpPr>
         <p:spPr>
           <a:xfrm>
-            <a:off x="713232" y="3529584"/>
-            <a:ext cx="7269480" cy="502920"/>
+            <a:off x="713232" y="3429000"/>
+            <a:ext cx="7269480" cy="457200"/>
           </a:xfrm>
           <a:prstGeom prst="rect">
             <a:avLst/>
@@ -2774,7 +2774,7 @@
             <a:r>
               <a:rPr lang="en-US" sz="1600" b="1" dirty="0">
                 <a:solidFill>
-                  <a:schemeClr val="bg1"/>
+                  <a:srgbClr val="00B0F0"/>
                 </a:solidFill>
                 <a:latin typeface="微軟正黑體" panose="020B0604030504040204" pitchFamily="34" charset="-120"/>
                 <a:ea typeface="微軟正黑體" panose="020B0604030504040204" pitchFamily="34" charset="-120"/>
@@ -2784,7 +2784,7 @@
             </a:r>
             <a:endParaRPr lang="en-US" sz="1600" b="1" dirty="0">
               <a:solidFill>
-                <a:schemeClr val="bg1"/>
+                <a:srgbClr val="00B0F0"/>
               </a:solidFill>
               <a:latin typeface="微軟正黑體" panose="020B0604030504040204" pitchFamily="34" charset="-120"/>
               <a:ea typeface="微軟正黑體" panose="020B0604030504040204" pitchFamily="34" charset="-120"/>
@@ -2800,8 +2800,8 @@
         </p:nvSpPr>
         <p:spPr>
           <a:xfrm>
-            <a:off x="685799" y="5532120"/>
-            <a:ext cx="8753475" cy="640080"/>
+            <a:off x="685799" y="3886200"/>
+            <a:ext cx="8753475" cy="2971800"/>
           </a:xfrm>
           <a:prstGeom prst="rect">
             <a:avLst/>
@@ -2817,7 +2817,7 @@
               <a:buNone/>
             </a:pPr>
             <a:r>
-              <a:rPr lang="en-US" sz="2400" b="1" dirty="0">
+              <a:rPr lang="en-US" altLang="zh-TW" sz="1600" b="1" dirty="0">
                 <a:solidFill>
                   <a:schemeClr val="bg1"/>
                 </a:solidFill>
@@ -2825,15 +2825,165 @@
                 <a:ea typeface="微軟正黑體" panose="020B0604030504040204" pitchFamily="34" charset="-120"/>
                 <a:cs typeface="Noto Sans CJK TC" pitchFamily="34" charset="-120"/>
               </a:rPr>
-              <a:t>B11508030 劉智昇、B11508023 許乃中、B11502142 高宇宏</a:t>
-            </a:r>
-            <a:endParaRPr lang="en-US" sz="2400" b="1" dirty="0">
+              <a:t>B11508030 </a:t>
+            </a:r>
+            <a:r>
+              <a:rPr lang="zh-TW" altLang="en-US" sz="1600" b="1" dirty="0">
+                <a:solidFill>
+                  <a:schemeClr val="bg1"/>
+                </a:solidFill>
+                <a:latin typeface="微軟正黑體" panose="020B0604030504040204" pitchFamily="34" charset="-120"/>
+                <a:ea typeface="微軟正黑體" panose="020B0604030504040204" pitchFamily="34" charset="-120"/>
+                <a:cs typeface="Noto Sans CJK TC" pitchFamily="34" charset="-120"/>
+              </a:rPr>
+              <a:t>劉智昇：</a:t>
+            </a:r>
+            <a:r>
+              <a:rPr lang="en-US" altLang="zh-TW" sz="1600" b="1" dirty="0">
+                <a:solidFill>
+                  <a:schemeClr val="bg1"/>
+                </a:solidFill>
+                <a:latin typeface="微軟正黑體" panose="020B0604030504040204" pitchFamily="34" charset="-120"/>
+                <a:ea typeface="微軟正黑體" panose="020B0604030504040204" pitchFamily="34" charset="-120"/>
+                <a:cs typeface="Noto Sans CJK TC" pitchFamily="34" charset="-120"/>
+              </a:rPr>
+              <a:t>OSM </a:t>
+            </a:r>
+            <a:r>
+              <a:rPr lang="zh-TW" altLang="en-US" sz="1600" b="1" dirty="0">
+                <a:solidFill>
+                  <a:schemeClr val="bg1"/>
+                </a:solidFill>
+                <a:latin typeface="微軟正黑體" panose="020B0604030504040204" pitchFamily="34" charset="-120"/>
+                <a:ea typeface="微軟正黑體" panose="020B0604030504040204" pitchFamily="34" charset="-120"/>
+                <a:cs typeface="Noto Sans CJK TC" pitchFamily="34" charset="-120"/>
+              </a:rPr>
+              <a:t>景點資料獲取與特徵轉換、旅遊偏好資料與互動資料整合、特徵前處理、模型選擇與訓練、推薦方法實作、結果分析、報告撰寫。</a:t>
+            </a:r>
+          </a:p>
+          <a:p>
+            <a:pPr marL="0" indent="0">
+              <a:buNone/>
+            </a:pPr>
+            <a:endParaRPr lang="zh-TW" altLang="en-US" sz="1600" b="1" dirty="0">
               <a:solidFill>
                 <a:schemeClr val="bg1"/>
               </a:solidFill>
               <a:latin typeface="微軟正黑體" panose="020B0604030504040204" pitchFamily="34" charset="-120"/>
               <a:ea typeface="微軟正黑體" panose="020B0604030504040204" pitchFamily="34" charset="-120"/>
+              <a:cs typeface="Noto Sans CJK TC" pitchFamily="34" charset="-120"/>
             </a:endParaRPr>
+          </a:p>
+          <a:p>
+            <a:pPr marL="0" indent="0">
+              <a:buNone/>
+            </a:pPr>
+            <a:r>
+              <a:rPr lang="en-US" altLang="zh-TW" sz="1600" b="1" dirty="0">
+                <a:solidFill>
+                  <a:schemeClr val="bg1"/>
+                </a:solidFill>
+                <a:latin typeface="微軟正黑體" panose="020B0604030504040204" pitchFamily="34" charset="-120"/>
+                <a:ea typeface="微軟正黑體" panose="020B0604030504040204" pitchFamily="34" charset="-120"/>
+                <a:cs typeface="Noto Sans CJK TC" pitchFamily="34" charset="-120"/>
+              </a:rPr>
+              <a:t>B11508023 </a:t>
+            </a:r>
+            <a:r>
+              <a:rPr lang="zh-TW" altLang="en-US" sz="1600" b="1" dirty="0">
+                <a:solidFill>
+                  <a:schemeClr val="bg1"/>
+                </a:solidFill>
+                <a:latin typeface="微軟正黑體" panose="020B0604030504040204" pitchFamily="34" charset="-120"/>
+                <a:ea typeface="微軟正黑體" panose="020B0604030504040204" pitchFamily="34" charset="-120"/>
+                <a:cs typeface="Noto Sans CJK TC" pitchFamily="34" charset="-120"/>
+              </a:rPr>
+              <a:t>許乃中：使用者互動資料整理、特徵前處理協助、</a:t>
+            </a:r>
+            <a:r>
+              <a:rPr lang="en-US" altLang="zh-TW" sz="1600" b="1" dirty="0">
+                <a:solidFill>
+                  <a:schemeClr val="bg1"/>
+                </a:solidFill>
+                <a:latin typeface="微軟正黑體" panose="020B0604030504040204" pitchFamily="34" charset="-120"/>
+                <a:ea typeface="微軟正黑體" panose="020B0604030504040204" pitchFamily="34" charset="-120"/>
+                <a:cs typeface="Noto Sans CJK TC" pitchFamily="34" charset="-120"/>
+              </a:rPr>
+              <a:t>cluster </a:t>
+            </a:r>
+            <a:r>
+              <a:rPr lang="zh-TW" altLang="en-US" sz="1600" b="1" dirty="0">
+                <a:solidFill>
+                  <a:schemeClr val="bg1"/>
+                </a:solidFill>
+                <a:latin typeface="微軟正黑體" panose="020B0604030504040204" pitchFamily="34" charset="-120"/>
+                <a:ea typeface="微軟正黑體" panose="020B0604030504040204" pitchFamily="34" charset="-120"/>
+                <a:cs typeface="Noto Sans CJK TC" pitchFamily="34" charset="-120"/>
+              </a:rPr>
+              <a:t>測試案例設計、推薦結果合理性檢查、報告撰寫。</a:t>
+            </a:r>
+          </a:p>
+          <a:p>
+            <a:pPr marL="0" indent="0">
+              <a:buNone/>
+            </a:pPr>
+            <a:endParaRPr lang="zh-TW" altLang="en-US" sz="1600" b="1" dirty="0">
+              <a:solidFill>
+                <a:schemeClr val="bg1"/>
+              </a:solidFill>
+              <a:latin typeface="微軟正黑體" panose="020B0604030504040204" pitchFamily="34" charset="-120"/>
+              <a:ea typeface="微軟正黑體" panose="020B0604030504040204" pitchFamily="34" charset="-120"/>
+              <a:cs typeface="Noto Sans CJK TC" pitchFamily="34" charset="-120"/>
+            </a:endParaRPr>
+          </a:p>
+          <a:p>
+            <a:pPr marL="0" indent="0">
+              <a:buNone/>
+            </a:pPr>
+            <a:r>
+              <a:rPr lang="en-US" altLang="zh-TW" sz="1600" b="1" dirty="0">
+                <a:solidFill>
+                  <a:schemeClr val="bg1"/>
+                </a:solidFill>
+                <a:latin typeface="微軟正黑體" panose="020B0604030504040204" pitchFamily="34" charset="-120"/>
+                <a:ea typeface="微軟正黑體" panose="020B0604030504040204" pitchFamily="34" charset="-120"/>
+                <a:cs typeface="Noto Sans CJK TC" pitchFamily="34" charset="-120"/>
+              </a:rPr>
+              <a:t>B11502142 </a:t>
+            </a:r>
+            <a:r>
+              <a:rPr lang="zh-TW" altLang="en-US" sz="1600" b="1" dirty="0">
+                <a:solidFill>
+                  <a:schemeClr val="bg1"/>
+                </a:solidFill>
+                <a:latin typeface="微軟正黑體" panose="020B0604030504040204" pitchFamily="34" charset="-120"/>
+                <a:ea typeface="微軟正黑體" panose="020B0604030504040204" pitchFamily="34" charset="-120"/>
+                <a:cs typeface="Noto Sans CJK TC" pitchFamily="34" charset="-120"/>
+              </a:rPr>
+              <a:t>高宇宏：</a:t>
+            </a:r>
+            <a:r>
+              <a:rPr lang="en-US" altLang="zh-TW" sz="1600" b="1" dirty="0">
+                <a:solidFill>
+                  <a:schemeClr val="bg1"/>
+                </a:solidFill>
+                <a:latin typeface="微軟正黑體" panose="020B0604030504040204" pitchFamily="34" charset="-120"/>
+                <a:ea typeface="微軟正黑體" panose="020B0604030504040204" pitchFamily="34" charset="-120"/>
+                <a:cs typeface="Noto Sans CJK TC" pitchFamily="34" charset="-120"/>
+              </a:rPr>
+              <a:t>OSM </a:t>
+            </a:r>
+            <a:r>
+              <a:rPr lang="zh-TW" altLang="en-US" sz="1600" b="1" dirty="0">
+                <a:solidFill>
+                  <a:schemeClr val="bg1"/>
+                </a:solidFill>
+                <a:latin typeface="微軟正黑體" panose="020B0604030504040204" pitchFamily="34" charset="-120"/>
+                <a:ea typeface="微軟正黑體" panose="020B0604030504040204" pitchFamily="34" charset="-120"/>
+                <a:cs typeface="Noto Sans CJK TC" pitchFamily="34" charset="-120"/>
+              </a:rPr>
+              <a:t>景點資料類型整理、旅遊偏好資料檢查、推薦方法比較整理、結果分析、簡報製作。</a:t>
+            </a:r>
           </a:p>
         </p:txBody>
       </p:sp>
